--- a/PMAssistant_Solution_Architecture.pptx
+++ b/PMAssistant_Solution_Architecture.pptx
@@ -13,6 +13,7 @@
     <p:sldId id="261" r:id="rId12"/>
     <p:sldId id="262" r:id="rId13"/>
     <p:sldId id="263" r:id="rId14"/>
+    <p:sldId id="264" r:id="rId15"/>
   </p:sldIdLst>
   <p:sldSz cx="12191695" cy="6858000" type="screen4x3"/>
   <p:notesSz cx="6858000" cy="9144000"/>
@@ -9903,6 +9904,1335 @@
                 <a:latin typeface="Aptos"/>
               </a:rPr>
               <a:t>PM Assistant | Technical Architecture | 15 September 2026</a:t>
+            </a:r>
+          </a:p>
+        </p:txBody>
+      </p:sp>
+    </p:spTree>
+  </p:cSld>
+  <p:clrMapOvr>
+    <a:masterClrMapping/>
+  </p:clrMapOvr>
+</p:sld>
+</file>
+
+<file path=ppt/slides/slide9.xml><?xml version="1.0" encoding="utf-8"?>
+<p:sld xmlns:a="http://schemas.openxmlformats.org/drawingml/2006/main" xmlns:p="http://schemas.openxmlformats.org/presentationml/2006/main" xmlns:r="http://schemas.openxmlformats.org/officeDocument/2006/relationships">
+  <p:cSld>
+    <p:bg>
+      <p:bgPr>
+        <a:solidFill>
+          <a:srgbClr val="05192D"/>
+        </a:solidFill>
+        <a:effectLst/>
+      </p:bgPr>
+    </p:bg>
+    <p:spTree>
+      <p:nvGrpSpPr>
+        <p:cNvPr id="1" name=""/>
+        <p:cNvGrpSpPr/>
+        <p:nvPr/>
+      </p:nvGrpSpPr>
+      <p:grpSpPr/>
+      <p:sp>
+        <p:nvSpPr>
+          <p:cNvPr id="2" name="TextBox 1"/>
+          <p:cNvSpPr txBox="1"/>
+          <p:nvPr/>
+        </p:nvSpPr>
+        <p:spPr>
+          <a:xfrm>
+            <a:off x="502920" y="228600"/>
+            <a:ext cx="11155680" cy="457200"/>
+          </a:xfrm>
+          <a:prstGeom prst="rect">
+            <a:avLst/>
+          </a:prstGeom>
+          <a:noFill/>
+        </p:spPr>
+        <p:txBody>
+          <a:bodyPr wrap="square" anchor="ctr">
+            <a:spAutoFit/>
+          </a:bodyPr>
+          <a:lstStyle/>
+          <a:p>
+            <a:pPr algn="l"/>
+            <a:r>
+              <a:rPr sz="2500" b="1">
+                <a:solidFill>
+                  <a:srgbClr val="D8B85A"/>
+                </a:solidFill>
+                <a:latin typeface="Aptos"/>
+              </a:rPr>
+              <a:t>Technical Architecture | Current Application</a:t>
+            </a:r>
+          </a:p>
+        </p:txBody>
+      </p:sp>
+      <p:sp>
+        <p:nvSpPr>
+          <p:cNvPr id="3" name="TextBox 2"/>
+          <p:cNvSpPr txBox="1"/>
+          <p:nvPr/>
+        </p:nvSpPr>
+        <p:spPr>
+          <a:xfrm>
+            <a:off x="530352" y="713232"/>
+            <a:ext cx="10972800" cy="320040"/>
+          </a:xfrm>
+          <a:prstGeom prst="rect">
+            <a:avLst/>
+          </a:prstGeom>
+          <a:noFill/>
+        </p:spPr>
+        <p:txBody>
+          <a:bodyPr wrap="square" anchor="ctr">
+            <a:spAutoFit/>
+          </a:bodyPr>
+          <a:lstStyle/>
+          <a:p>
+            <a:pPr algn="l"/>
+            <a:r>
+              <a:rPr sz="1100" b="0">
+                <a:solidFill>
+                  <a:srgbClr val="C2D3DE"/>
+                </a:solidFill>
+                <a:latin typeface="Aptos"/>
+              </a:rPr>
+              <a:t>Two-mode deterministic staffing assistant using the TechOps workbook as the source of truth</a:t>
+            </a:r>
+          </a:p>
+        </p:txBody>
+      </p:sp>
+      <p:sp>
+        <p:nvSpPr>
+          <p:cNvPr id="4" name="Rounded Rectangle 3"/>
+          <p:cNvSpPr/>
+          <p:nvPr/>
+        </p:nvSpPr>
+        <p:spPr>
+          <a:xfrm>
+            <a:off x="9372600" y="256032"/>
+            <a:ext cx="822960" cy="310896"/>
+          </a:xfrm>
+          <a:prstGeom prst="roundRect">
+            <a:avLst/>
+          </a:prstGeom>
+          <a:solidFill>
+            <a:srgbClr val="165287"/>
+          </a:solidFill>
+          <a:ln>
+            <a:noFill/>
+          </a:ln>
+        </p:spPr>
+        <p:style>
+          <a:lnRef idx="1">
+            <a:schemeClr val="accent1"/>
+          </a:lnRef>
+          <a:fillRef idx="3">
+            <a:schemeClr val="accent1"/>
+          </a:fillRef>
+          <a:effectRef idx="2">
+            <a:schemeClr val="accent1"/>
+          </a:effectRef>
+          <a:fontRef idx="minor">
+            <a:schemeClr val="lt1"/>
+          </a:fontRef>
+        </p:style>
+        <p:txBody>
+          <a:bodyPr rtlCol="0" anchor="ctr"/>
+          <a:lstStyle/>
+          <a:p>
+            <a:pPr algn="ctr"/>
+          </a:p>
+        </p:txBody>
+      </p:sp>
+      <p:sp>
+        <p:nvSpPr>
+          <p:cNvPr id="5" name="TextBox 4"/>
+          <p:cNvSpPr txBox="1"/>
+          <p:nvPr/>
+        </p:nvSpPr>
+        <p:spPr>
+          <a:xfrm>
+            <a:off x="9372600" y="256032"/>
+            <a:ext cx="822960" cy="310896"/>
+          </a:xfrm>
+          <a:prstGeom prst="rect">
+            <a:avLst/>
+          </a:prstGeom>
+          <a:noFill/>
+        </p:spPr>
+        <p:txBody>
+          <a:bodyPr wrap="square" anchor="ctr">
+            <a:spAutoFit/>
+          </a:bodyPr>
+          <a:lstStyle/>
+          <a:p>
+            <a:pPr algn="ctr"/>
+            <a:r>
+              <a:rPr sz="800" b="1">
+                <a:solidFill>
+                  <a:srgbClr val="F5F2E9"/>
+                </a:solidFill>
+                <a:latin typeface="Aptos"/>
+              </a:rPr>
+              <a:t>PYTHON</a:t>
+            </a:r>
+          </a:p>
+        </p:txBody>
+      </p:sp>
+      <p:sp>
+        <p:nvSpPr>
+          <p:cNvPr id="6" name="Rounded Rectangle 5"/>
+          <p:cNvSpPr/>
+          <p:nvPr/>
+        </p:nvSpPr>
+        <p:spPr>
+          <a:xfrm>
+            <a:off x="10259568" y="256032"/>
+            <a:ext cx="822960" cy="310896"/>
+          </a:xfrm>
+          <a:prstGeom prst="roundRect">
+            <a:avLst/>
+          </a:prstGeom>
+          <a:solidFill>
+            <a:srgbClr val="0F7E93"/>
+          </a:solidFill>
+          <a:ln>
+            <a:noFill/>
+          </a:ln>
+        </p:spPr>
+        <p:style>
+          <a:lnRef idx="1">
+            <a:schemeClr val="accent1"/>
+          </a:lnRef>
+          <a:fillRef idx="3">
+            <a:schemeClr val="accent1"/>
+          </a:fillRef>
+          <a:effectRef idx="2">
+            <a:schemeClr val="accent1"/>
+          </a:effectRef>
+          <a:fontRef idx="minor">
+            <a:schemeClr val="lt1"/>
+          </a:fontRef>
+        </p:style>
+        <p:txBody>
+          <a:bodyPr rtlCol="0" anchor="ctr"/>
+          <a:lstStyle/>
+          <a:p>
+            <a:pPr algn="ctr"/>
+          </a:p>
+        </p:txBody>
+      </p:sp>
+      <p:sp>
+        <p:nvSpPr>
+          <p:cNvPr id="7" name="TextBox 6"/>
+          <p:cNvSpPr txBox="1"/>
+          <p:nvPr/>
+        </p:nvSpPr>
+        <p:spPr>
+          <a:xfrm>
+            <a:off x="10259568" y="256032"/>
+            <a:ext cx="822960" cy="310896"/>
+          </a:xfrm>
+          <a:prstGeom prst="rect">
+            <a:avLst/>
+          </a:prstGeom>
+          <a:noFill/>
+        </p:spPr>
+        <p:txBody>
+          <a:bodyPr wrap="square" anchor="ctr">
+            <a:spAutoFit/>
+          </a:bodyPr>
+          <a:lstStyle/>
+          <a:p>
+            <a:pPr algn="ctr"/>
+            <a:r>
+              <a:rPr sz="800" b="1">
+                <a:solidFill>
+                  <a:srgbClr val="F5F2E9"/>
+                </a:solidFill>
+                <a:latin typeface="Aptos"/>
+              </a:rPr>
+              <a:t>STREAMLIT</a:t>
+            </a:r>
+          </a:p>
+        </p:txBody>
+      </p:sp>
+      <p:sp>
+        <p:nvSpPr>
+          <p:cNvPr id="8" name="Rounded Rectangle 7"/>
+          <p:cNvSpPr/>
+          <p:nvPr/>
+        </p:nvSpPr>
+        <p:spPr>
+          <a:xfrm>
+            <a:off x="11292840" y="256032"/>
+            <a:ext cx="822960" cy="310896"/>
+          </a:xfrm>
+          <a:prstGeom prst="roundRect">
+            <a:avLst/>
+          </a:prstGeom>
+          <a:solidFill>
+            <a:srgbClr val="37916E"/>
+          </a:solidFill>
+          <a:ln>
+            <a:noFill/>
+          </a:ln>
+        </p:spPr>
+        <p:style>
+          <a:lnRef idx="1">
+            <a:schemeClr val="accent1"/>
+          </a:lnRef>
+          <a:fillRef idx="3">
+            <a:schemeClr val="accent1"/>
+          </a:fillRef>
+          <a:effectRef idx="2">
+            <a:schemeClr val="accent1"/>
+          </a:effectRef>
+          <a:fontRef idx="minor">
+            <a:schemeClr val="lt1"/>
+          </a:fontRef>
+        </p:style>
+        <p:txBody>
+          <a:bodyPr rtlCol="0" anchor="ctr"/>
+          <a:lstStyle/>
+          <a:p>
+            <a:pPr algn="ctr"/>
+          </a:p>
+        </p:txBody>
+      </p:sp>
+      <p:sp>
+        <p:nvSpPr>
+          <p:cNvPr id="9" name="TextBox 8"/>
+          <p:cNvSpPr txBox="1"/>
+          <p:nvPr/>
+        </p:nvSpPr>
+        <p:spPr>
+          <a:xfrm>
+            <a:off x="11292840" y="256032"/>
+            <a:ext cx="822960" cy="310896"/>
+          </a:xfrm>
+          <a:prstGeom prst="rect">
+            <a:avLst/>
+          </a:prstGeom>
+          <a:noFill/>
+        </p:spPr>
+        <p:txBody>
+          <a:bodyPr wrap="square" anchor="ctr">
+            <a:spAutoFit/>
+          </a:bodyPr>
+          <a:lstStyle/>
+          <a:p>
+            <a:pPr algn="ctr"/>
+            <a:r>
+              <a:rPr sz="800" b="1">
+                <a:solidFill>
+                  <a:srgbClr val="F5F2E9"/>
+                </a:solidFill>
+                <a:latin typeface="Aptos"/>
+              </a:rPr>
+              <a:t>FASTAPI</a:t>
+            </a:r>
+          </a:p>
+        </p:txBody>
+      </p:sp>
+      <p:sp>
+        <p:nvSpPr>
+          <p:cNvPr id="10" name="Rounded Rectangle 9"/>
+          <p:cNvSpPr/>
+          <p:nvPr/>
+        </p:nvSpPr>
+        <p:spPr>
+          <a:xfrm>
+            <a:off x="502920" y="1325880"/>
+            <a:ext cx="2057400" cy="1874519"/>
+          </a:xfrm>
+          <a:prstGeom prst="roundRect">
+            <a:avLst/>
+          </a:prstGeom>
+          <a:solidFill>
+            <a:srgbClr val="0E385A"/>
+          </a:solidFill>
+          <a:ln w="12700">
+            <a:solidFill>
+              <a:srgbClr val="467DA5"/>
+            </a:solidFill>
+          </a:ln>
+        </p:spPr>
+        <p:style>
+          <a:lnRef idx="1">
+            <a:schemeClr val="accent1"/>
+          </a:lnRef>
+          <a:fillRef idx="3">
+            <a:schemeClr val="accent1"/>
+          </a:fillRef>
+          <a:effectRef idx="2">
+            <a:schemeClr val="accent1"/>
+          </a:effectRef>
+          <a:fontRef idx="minor">
+            <a:schemeClr val="lt1"/>
+          </a:fontRef>
+        </p:style>
+        <p:txBody>
+          <a:bodyPr rtlCol="0" anchor="ctr"/>
+          <a:lstStyle/>
+          <a:p>
+            <a:pPr algn="ctr"/>
+          </a:p>
+        </p:txBody>
+      </p:sp>
+      <p:sp>
+        <p:nvSpPr>
+          <p:cNvPr id="11" name="TextBox 10"/>
+          <p:cNvSpPr txBox="1"/>
+          <p:nvPr/>
+        </p:nvSpPr>
+        <p:spPr>
+          <a:xfrm>
+            <a:off x="630936" y="1417320"/>
+            <a:ext cx="1801368" cy="310896"/>
+          </a:xfrm>
+          <a:prstGeom prst="rect">
+            <a:avLst/>
+          </a:prstGeom>
+          <a:noFill/>
+        </p:spPr>
+        <p:txBody>
+          <a:bodyPr wrap="square" anchor="ctr">
+            <a:spAutoFit/>
+          </a:bodyPr>
+          <a:lstStyle/>
+          <a:p>
+            <a:pPr algn="l"/>
+            <a:r>
+              <a:rPr sz="1300" b="1">
+                <a:solidFill>
+                  <a:srgbClr val="D8B85A"/>
+                </a:solidFill>
+                <a:latin typeface="Aptos"/>
+              </a:rPr>
+              <a:t>1 | USER EXPERIENCE</a:t>
+            </a:r>
+          </a:p>
+        </p:txBody>
+      </p:sp>
+      <p:sp>
+        <p:nvSpPr>
+          <p:cNvPr id="12" name="TextBox 11"/>
+          <p:cNvSpPr txBox="1"/>
+          <p:nvPr/>
+        </p:nvSpPr>
+        <p:spPr>
+          <a:xfrm>
+            <a:off x="630936" y="1764792"/>
+            <a:ext cx="1801368" cy="1344167"/>
+          </a:xfrm>
+          <a:prstGeom prst="rect">
+            <a:avLst/>
+          </a:prstGeom>
+          <a:noFill/>
+        </p:spPr>
+        <p:txBody>
+          <a:bodyPr wrap="square" anchor="ctr">
+            <a:spAutoFit/>
+          </a:bodyPr>
+          <a:lstStyle/>
+          <a:p>
+            <a:pPr algn="l"/>
+            <a:r>
+              <a:rPr sz="1050" b="0">
+                <a:solidFill>
+                  <a:srgbClr val="F5F2E9"/>
+                </a:solidFill>
+                <a:latin typeface="Aptos"/>
+              </a:rPr>
+              <a:t>Staffing user
+Natural-language prompt
+Chat history
+Metrics and downloads</a:t>
+            </a:r>
+          </a:p>
+        </p:txBody>
+      </p:sp>
+      <p:sp>
+        <p:nvSpPr>
+          <p:cNvPr id="13" name="Rounded Rectangle 12"/>
+          <p:cNvSpPr/>
+          <p:nvPr/>
+        </p:nvSpPr>
+        <p:spPr>
+          <a:xfrm>
+            <a:off x="2971800" y="1325880"/>
+            <a:ext cx="2240280" cy="1874519"/>
+          </a:xfrm>
+          <a:prstGeom prst="roundRect">
+            <a:avLst/>
+          </a:prstGeom>
+          <a:solidFill>
+            <a:srgbClr val="114869"/>
+          </a:solidFill>
+          <a:ln w="12700">
+            <a:solidFill>
+              <a:srgbClr val="467DA5"/>
+            </a:solidFill>
+          </a:ln>
+        </p:spPr>
+        <p:style>
+          <a:lnRef idx="1">
+            <a:schemeClr val="accent1"/>
+          </a:lnRef>
+          <a:fillRef idx="3">
+            <a:schemeClr val="accent1"/>
+          </a:fillRef>
+          <a:effectRef idx="2">
+            <a:schemeClr val="accent1"/>
+          </a:effectRef>
+          <a:fontRef idx="minor">
+            <a:schemeClr val="lt1"/>
+          </a:fontRef>
+        </p:style>
+        <p:txBody>
+          <a:bodyPr rtlCol="0" anchor="ctr"/>
+          <a:lstStyle/>
+          <a:p>
+            <a:pPr algn="ctr"/>
+          </a:p>
+        </p:txBody>
+      </p:sp>
+      <p:sp>
+        <p:nvSpPr>
+          <p:cNvPr id="14" name="TextBox 13"/>
+          <p:cNvSpPr txBox="1"/>
+          <p:nvPr/>
+        </p:nvSpPr>
+        <p:spPr>
+          <a:xfrm>
+            <a:off x="3099816" y="1417320"/>
+            <a:ext cx="1984248" cy="310896"/>
+          </a:xfrm>
+          <a:prstGeom prst="rect">
+            <a:avLst/>
+          </a:prstGeom>
+          <a:noFill/>
+        </p:spPr>
+        <p:txBody>
+          <a:bodyPr wrap="square" anchor="ctr">
+            <a:spAutoFit/>
+          </a:bodyPr>
+          <a:lstStyle/>
+          <a:p>
+            <a:pPr algn="l"/>
+            <a:r>
+              <a:rPr sz="1300" b="1">
+                <a:solidFill>
+                  <a:srgbClr val="D8B85A"/>
+                </a:solidFill>
+                <a:latin typeface="Aptos"/>
+              </a:rPr>
+              <a:t>2 | STREAMLIT UI</a:t>
+            </a:r>
+          </a:p>
+        </p:txBody>
+      </p:sp>
+      <p:sp>
+        <p:nvSpPr>
+          <p:cNvPr id="15" name="TextBox 14"/>
+          <p:cNvSpPr txBox="1"/>
+          <p:nvPr/>
+        </p:nvSpPr>
+        <p:spPr>
+          <a:xfrm>
+            <a:off x="3099816" y="1764792"/>
+            <a:ext cx="1984248" cy="1344167"/>
+          </a:xfrm>
+          <a:prstGeom prst="rect">
+            <a:avLst/>
+          </a:prstGeom>
+          <a:noFill/>
+        </p:spPr>
+        <p:txBody>
+          <a:bodyPr wrap="square" anchor="ctr">
+            <a:spAutoFit/>
+          </a:bodyPr>
+          <a:lstStyle/>
+          <a:p>
+            <a:pPr algn="l"/>
+            <a:r>
+              <a:rPr sz="1050" b="0">
+                <a:solidFill>
+                  <a:srgbClr val="F5F2E9"/>
+                </a:solidFill>
+                <a:latin typeface="Aptos"/>
+              </a:rPr>
+              <a:t>app.py
+Chat input and intent display
+Requested-role table
+Matching-resource table
+CSV / Excel export</a:t>
+            </a:r>
+          </a:p>
+        </p:txBody>
+      </p:sp>
+      <p:sp>
+        <p:nvSpPr>
+          <p:cNvPr id="16" name="Rounded Rectangle 15"/>
+          <p:cNvSpPr/>
+          <p:nvPr/>
+        </p:nvSpPr>
+        <p:spPr>
+          <a:xfrm>
+            <a:off x="5623560" y="1325880"/>
+            <a:ext cx="2331720" cy="1874519"/>
+          </a:xfrm>
+          <a:prstGeom prst="roundRect">
+            <a:avLst/>
+          </a:prstGeom>
+          <a:solidFill>
+            <a:srgbClr val="125B71"/>
+          </a:solidFill>
+          <a:ln w="12700">
+            <a:solidFill>
+              <a:srgbClr val="467DA5"/>
+            </a:solidFill>
+          </a:ln>
+        </p:spPr>
+        <p:style>
+          <a:lnRef idx="1">
+            <a:schemeClr val="accent1"/>
+          </a:lnRef>
+          <a:fillRef idx="3">
+            <a:schemeClr val="accent1"/>
+          </a:fillRef>
+          <a:effectRef idx="2">
+            <a:schemeClr val="accent1"/>
+          </a:effectRef>
+          <a:fontRef idx="minor">
+            <a:schemeClr val="lt1"/>
+          </a:fontRef>
+        </p:style>
+        <p:txBody>
+          <a:bodyPr rtlCol="0" anchor="ctr"/>
+          <a:lstStyle/>
+          <a:p>
+            <a:pPr algn="ctr"/>
+          </a:p>
+        </p:txBody>
+      </p:sp>
+      <p:sp>
+        <p:nvSpPr>
+          <p:cNvPr id="17" name="TextBox 16"/>
+          <p:cNvSpPr txBox="1"/>
+          <p:nvPr/>
+        </p:nvSpPr>
+        <p:spPr>
+          <a:xfrm>
+            <a:off x="5751576" y="1417320"/>
+            <a:ext cx="2075687" cy="310896"/>
+          </a:xfrm>
+          <a:prstGeom prst="rect">
+            <a:avLst/>
+          </a:prstGeom>
+          <a:noFill/>
+        </p:spPr>
+        <p:txBody>
+          <a:bodyPr wrap="square" anchor="ctr">
+            <a:spAutoFit/>
+          </a:bodyPr>
+          <a:lstStyle/>
+          <a:p>
+            <a:pPr algn="l"/>
+            <a:r>
+              <a:rPr sz="1300" b="1">
+                <a:solidFill>
+                  <a:srgbClr val="D8B85A"/>
+                </a:solidFill>
+                <a:latin typeface="Aptos"/>
+              </a:rPr>
+              <a:t>3 | API + SERVICE</a:t>
+            </a:r>
+          </a:p>
+        </p:txBody>
+      </p:sp>
+      <p:sp>
+        <p:nvSpPr>
+          <p:cNvPr id="18" name="TextBox 17"/>
+          <p:cNvSpPr txBox="1"/>
+          <p:nvPr/>
+        </p:nvSpPr>
+        <p:spPr>
+          <a:xfrm>
+            <a:off x="5751576" y="1764792"/>
+            <a:ext cx="2075687" cy="1344167"/>
+          </a:xfrm>
+          <a:prstGeom prst="rect">
+            <a:avLst/>
+          </a:prstGeom>
+          <a:noFill/>
+        </p:spPr>
+        <p:txBody>
+          <a:bodyPr wrap="square" anchor="ctr">
+            <a:spAutoFit/>
+          </a:bodyPr>
+          <a:lstStyle/>
+          <a:p>
+            <a:pPr algn="l"/>
+            <a:r>
+              <a:rPr sz="1050" b="0">
+                <a:solidFill>
+                  <a:srgbClr val="F5F2E9"/>
+                </a:solidFill>
+                <a:latin typeface="Aptos"/>
+              </a:rPr>
+              <a:t>main.py / FastAPI
+POST /resources/analyze
+TechOpsService.py
+Schema validation
+JSON-safe results</a:t>
+            </a:r>
+          </a:p>
+        </p:txBody>
+      </p:sp>
+      <p:sp>
+        <p:nvSpPr>
+          <p:cNvPr id="19" name="Rounded Rectangle 18"/>
+          <p:cNvSpPr/>
+          <p:nvPr/>
+        </p:nvSpPr>
+        <p:spPr>
+          <a:xfrm>
+            <a:off x="8366760" y="1325880"/>
+            <a:ext cx="3154680" cy="1874519"/>
+          </a:xfrm>
+          <a:prstGeom prst="roundRect">
+            <a:avLst/>
+          </a:prstGeom>
+          <a:solidFill>
+            <a:srgbClr val="1B4C5D"/>
+          </a:solidFill>
+          <a:ln w="12700">
+            <a:solidFill>
+              <a:srgbClr val="467DA5"/>
+            </a:solidFill>
+          </a:ln>
+        </p:spPr>
+        <p:style>
+          <a:lnRef idx="1">
+            <a:schemeClr val="accent1"/>
+          </a:lnRef>
+          <a:fillRef idx="3">
+            <a:schemeClr val="accent1"/>
+          </a:fillRef>
+          <a:effectRef idx="2">
+            <a:schemeClr val="accent1"/>
+          </a:effectRef>
+          <a:fontRef idx="minor">
+            <a:schemeClr val="lt1"/>
+          </a:fontRef>
+        </p:style>
+        <p:txBody>
+          <a:bodyPr rtlCol="0" anchor="ctr"/>
+          <a:lstStyle/>
+          <a:p>
+            <a:pPr algn="ctr"/>
+          </a:p>
+        </p:txBody>
+      </p:sp>
+      <p:sp>
+        <p:nvSpPr>
+          <p:cNvPr id="20" name="TextBox 19"/>
+          <p:cNvSpPr txBox="1"/>
+          <p:nvPr/>
+        </p:nvSpPr>
+        <p:spPr>
+          <a:xfrm>
+            <a:off x="8494776" y="1417320"/>
+            <a:ext cx="2898648" cy="310896"/>
+          </a:xfrm>
+          <a:prstGeom prst="rect">
+            <a:avLst/>
+          </a:prstGeom>
+          <a:noFill/>
+        </p:spPr>
+        <p:txBody>
+          <a:bodyPr wrap="square" anchor="ctr">
+            <a:spAutoFit/>
+          </a:bodyPr>
+          <a:lstStyle/>
+          <a:p>
+            <a:pPr algn="l"/>
+            <a:r>
+              <a:rPr sz="1300" b="1">
+                <a:solidFill>
+                  <a:srgbClr val="D8B85A"/>
+                </a:solidFill>
+                <a:latin typeface="Aptos"/>
+              </a:rPr>
+              <a:t>4 | DATA SOURCE</a:t>
+            </a:r>
+          </a:p>
+        </p:txBody>
+      </p:sp>
+      <p:sp>
+        <p:nvSpPr>
+          <p:cNvPr id="21" name="TextBox 20"/>
+          <p:cNvSpPr txBox="1"/>
+          <p:nvPr/>
+        </p:nvSpPr>
+        <p:spPr>
+          <a:xfrm>
+            <a:off x="8494776" y="1764792"/>
+            <a:ext cx="2898648" cy="1344167"/>
+          </a:xfrm>
+          <a:prstGeom prst="rect">
+            <a:avLst/>
+          </a:prstGeom>
+          <a:noFill/>
+        </p:spPr>
+        <p:txBody>
+          <a:bodyPr wrap="square" anchor="ctr">
+            <a:spAutoFit/>
+          </a:bodyPr>
+          <a:lstStyle/>
+          <a:p>
+            <a:pPr algn="l"/>
+            <a:r>
+              <a:rPr sz="1050" b="0">
+                <a:solidFill>
+                  <a:srgbClr val="F5F2E9"/>
+                </a:solidFill>
+                <a:latin typeface="Aptos"/>
+              </a:rPr>
+              <a:t>Data/TechOps_DataFile.xlsx
+14 PMO fields
+Skills and competency
+Career level
+Availability
+Contract dates
+Location and organization</a:t>
+            </a:r>
+          </a:p>
+        </p:txBody>
+      </p:sp>
+      <p:cxnSp>
+        <p:nvCxnSpPr>
+          <p:cNvPr id="22" name="Connector 21"/>
+          <p:cNvCxnSpPr/>
+          <p:nvPr/>
+        </p:nvCxnSpPr>
+        <p:spPr>
+          <a:xfrm>
+            <a:off x="2578608" y="2249424"/>
+            <a:ext cx="329184" cy="0"/>
+          </a:xfrm>
+          <a:prstGeom prst="line">
+            <a:avLst/>
+          </a:prstGeom>
+          <a:ln w="25400">
+            <a:solidFill>
+              <a:srgbClr val="D8B85A"/>
+            </a:solidFill>
+          </a:ln>
+        </p:spPr>
+        <p:style>
+          <a:lnRef idx="2">
+            <a:schemeClr val="accent1"/>
+          </a:lnRef>
+          <a:fillRef idx="0">
+            <a:schemeClr val="accent1"/>
+          </a:fillRef>
+          <a:effectRef idx="1">
+            <a:schemeClr val="accent1"/>
+          </a:effectRef>
+          <a:fontRef idx="minor">
+            <a:schemeClr val="tx1"/>
+          </a:fontRef>
+        </p:style>
+      </p:cxnSp>
+      <p:cxnSp>
+        <p:nvCxnSpPr>
+          <p:cNvPr id="23" name="Connector 22"/>
+          <p:cNvCxnSpPr/>
+          <p:nvPr/>
+        </p:nvCxnSpPr>
+        <p:spPr>
+          <a:xfrm>
+            <a:off x="5230368" y="2249424"/>
+            <a:ext cx="329184" cy="0"/>
+          </a:xfrm>
+          <a:prstGeom prst="line">
+            <a:avLst/>
+          </a:prstGeom>
+          <a:ln w="25400">
+            <a:solidFill>
+              <a:srgbClr val="D8B85A"/>
+            </a:solidFill>
+          </a:ln>
+        </p:spPr>
+        <p:style>
+          <a:lnRef idx="2">
+            <a:schemeClr val="accent1"/>
+          </a:lnRef>
+          <a:fillRef idx="0">
+            <a:schemeClr val="accent1"/>
+          </a:fillRef>
+          <a:effectRef idx="1">
+            <a:schemeClr val="accent1"/>
+          </a:effectRef>
+          <a:fontRef idx="minor">
+            <a:schemeClr val="tx1"/>
+          </a:fontRef>
+        </p:style>
+      </p:cxnSp>
+      <p:cxnSp>
+        <p:nvCxnSpPr>
+          <p:cNvPr id="24" name="Connector 23"/>
+          <p:cNvCxnSpPr/>
+          <p:nvPr/>
+        </p:nvCxnSpPr>
+        <p:spPr>
+          <a:xfrm>
+            <a:off x="8010144" y="2249424"/>
+            <a:ext cx="292608" cy="0"/>
+          </a:xfrm>
+          <a:prstGeom prst="line">
+            <a:avLst/>
+          </a:prstGeom>
+          <a:ln w="25400">
+            <a:solidFill>
+              <a:srgbClr val="D8B85A"/>
+            </a:solidFill>
+          </a:ln>
+        </p:spPr>
+        <p:style>
+          <a:lnRef idx="2">
+            <a:schemeClr val="accent1"/>
+          </a:lnRef>
+          <a:fillRef idx="0">
+            <a:schemeClr val="accent1"/>
+          </a:fillRef>
+          <a:effectRef idx="1">
+            <a:schemeClr val="accent1"/>
+          </a:effectRef>
+          <a:fontRef idx="minor">
+            <a:schemeClr val="tx1"/>
+          </a:fontRef>
+        </p:style>
+      </p:cxnSp>
+      <p:sp>
+        <p:nvSpPr>
+          <p:cNvPr id="25" name="TextBox 24"/>
+          <p:cNvSpPr txBox="1"/>
+          <p:nvPr/>
+        </p:nvSpPr>
+        <p:spPr>
+          <a:xfrm>
+            <a:off x="548640" y="3502152"/>
+            <a:ext cx="10972800" cy="310896"/>
+          </a:xfrm>
+          <a:prstGeom prst="rect">
+            <a:avLst/>
+          </a:prstGeom>
+          <a:noFill/>
+        </p:spPr>
+        <p:txBody>
+          <a:bodyPr wrap="square" anchor="ctr">
+            <a:spAutoFit/>
+          </a:bodyPr>
+          <a:lstStyle/>
+          <a:p>
+            <a:pPr algn="l"/>
+            <a:r>
+              <a:rPr sz="1400" b="1">
+                <a:solidFill>
+                  <a:srgbClr val="D8B85A"/>
+                </a:solidFill>
+                <a:latin typeface="Aptos"/>
+              </a:rPr>
+              <a:t>Intent routing and deterministic decision paths</a:t>
+            </a:r>
+          </a:p>
+        </p:txBody>
+      </p:sp>
+      <p:sp>
+        <p:nvSpPr>
+          <p:cNvPr id="26" name="Rounded Rectangle 25"/>
+          <p:cNvSpPr/>
+          <p:nvPr/>
+        </p:nvSpPr>
+        <p:spPr>
+          <a:xfrm>
+            <a:off x="502920" y="3913632"/>
+            <a:ext cx="5303520" cy="1417320"/>
+          </a:xfrm>
+          <a:prstGeom prst="roundRect">
+            <a:avLst/>
+          </a:prstGeom>
+          <a:solidFill>
+            <a:srgbClr val="0C4160"/>
+          </a:solidFill>
+          <a:ln w="12700">
+            <a:solidFill>
+              <a:srgbClr val="467DA5"/>
+            </a:solidFill>
+          </a:ln>
+        </p:spPr>
+        <p:style>
+          <a:lnRef idx="1">
+            <a:schemeClr val="accent1"/>
+          </a:lnRef>
+          <a:fillRef idx="3">
+            <a:schemeClr val="accent1"/>
+          </a:fillRef>
+          <a:effectRef idx="2">
+            <a:schemeClr val="accent1"/>
+          </a:effectRef>
+          <a:fontRef idx="minor">
+            <a:schemeClr val="lt1"/>
+          </a:fontRef>
+        </p:style>
+        <p:txBody>
+          <a:bodyPr rtlCol="0" anchor="ctr"/>
+          <a:lstStyle/>
+          <a:p>
+            <a:pPr algn="ctr"/>
+          </a:p>
+        </p:txBody>
+      </p:sp>
+      <p:sp>
+        <p:nvSpPr>
+          <p:cNvPr id="27" name="TextBox 26"/>
+          <p:cNvSpPr txBox="1"/>
+          <p:nvPr/>
+        </p:nvSpPr>
+        <p:spPr>
+          <a:xfrm>
+            <a:off x="630936" y="4005072"/>
+            <a:ext cx="5047488" cy="310896"/>
+          </a:xfrm>
+          <a:prstGeom prst="rect">
+            <a:avLst/>
+          </a:prstGeom>
+          <a:noFill/>
+        </p:spPr>
+        <p:txBody>
+          <a:bodyPr wrap="square" anchor="ctr">
+            <a:spAutoFit/>
+          </a:bodyPr>
+          <a:lstStyle/>
+          <a:p>
+            <a:pPr algn="l"/>
+            <a:r>
+              <a:rPr sz="1300" b="1">
+                <a:solidFill>
+                  <a:srgbClr val="ECF3F7"/>
+                </a:solidFill>
+                <a:latin typeface="Aptos"/>
+              </a:rPr>
+              <a:t>MODE 1 | INDIVIDUAL RESOURCE SEARCH</a:t>
+            </a:r>
+          </a:p>
+        </p:txBody>
+      </p:sp>
+      <p:sp>
+        <p:nvSpPr>
+          <p:cNvPr id="28" name="TextBox 27"/>
+          <p:cNvSpPr txBox="1"/>
+          <p:nvPr/>
+        </p:nvSpPr>
+        <p:spPr>
+          <a:xfrm>
+            <a:off x="630936" y="4352544"/>
+            <a:ext cx="5047488" cy="886968"/>
+          </a:xfrm>
+          <a:prstGeom prst="rect">
+            <a:avLst/>
+          </a:prstGeom>
+          <a:noFill/>
+        </p:spPr>
+        <p:txBody>
+          <a:bodyPr wrap="square" anchor="ctr">
+            <a:spAutoFit/>
+          </a:bodyPr>
+          <a:lstStyle/>
+          <a:p>
+            <a:pPr algn="l"/>
+            <a:r>
+              <a:rPr sz="1050" b="0">
+                <a:solidFill>
+                  <a:srgbClr val="F5F2E9"/>
+                </a:solidFill>
+                <a:latin typeface="Aptos"/>
+              </a:rPr>
+              <a:t>Prompt parser → skill / CL / date / location filters → primary or secondary skill match → ranked resources
+Output: validated individual resource list with MatchScore and MatchedFields</a:t>
+            </a:r>
+          </a:p>
+        </p:txBody>
+      </p:sp>
+      <p:sp>
+        <p:nvSpPr>
+          <p:cNvPr id="29" name="Rounded Rectangle 28"/>
+          <p:cNvSpPr/>
+          <p:nvPr/>
+        </p:nvSpPr>
+        <p:spPr>
+          <a:xfrm>
+            <a:off x="6080760" y="3913632"/>
+            <a:ext cx="5440680" cy="1417320"/>
+          </a:xfrm>
+          <a:prstGeom prst="roundRect">
+            <a:avLst/>
+          </a:prstGeom>
+          <a:solidFill>
+            <a:srgbClr val="0C525F"/>
+          </a:solidFill>
+          <a:ln w="12700">
+            <a:solidFill>
+              <a:srgbClr val="467DA5"/>
+            </a:solidFill>
+          </a:ln>
+        </p:spPr>
+        <p:style>
+          <a:lnRef idx="1">
+            <a:schemeClr val="accent1"/>
+          </a:lnRef>
+          <a:fillRef idx="3">
+            <a:schemeClr val="accent1"/>
+          </a:fillRef>
+          <a:effectRef idx="2">
+            <a:schemeClr val="accent1"/>
+          </a:effectRef>
+          <a:fontRef idx="minor">
+            <a:schemeClr val="lt1"/>
+          </a:fontRef>
+        </p:style>
+        <p:txBody>
+          <a:bodyPr rtlCol="0" anchor="ctr"/>
+          <a:lstStyle/>
+          <a:p>
+            <a:pPr algn="ctr"/>
+          </a:p>
+        </p:txBody>
+      </p:sp>
+      <p:sp>
+        <p:nvSpPr>
+          <p:cNvPr id="30" name="TextBox 29"/>
+          <p:cNvSpPr txBox="1"/>
+          <p:nvPr/>
+        </p:nvSpPr>
+        <p:spPr>
+          <a:xfrm>
+            <a:off x="6208776" y="4005072"/>
+            <a:ext cx="5184648" cy="310896"/>
+          </a:xfrm>
+          <a:prstGeom prst="rect">
+            <a:avLst/>
+          </a:prstGeom>
+          <a:noFill/>
+        </p:spPr>
+        <p:txBody>
+          <a:bodyPr wrap="square" anchor="ctr">
+            <a:spAutoFit/>
+          </a:bodyPr>
+          <a:lstStyle/>
+          <a:p>
+            <a:pPr algn="l"/>
+            <a:r>
+              <a:rPr sz="1300" b="1">
+                <a:solidFill>
+                  <a:srgbClr val="ECF3F7"/>
+                </a:solidFill>
+                <a:latin typeface="Aptos"/>
+              </a:rPr>
+              <a:t>MODE 2 | TEAM COMPOSITION</a:t>
+            </a:r>
+          </a:p>
+        </p:txBody>
+      </p:sp>
+      <p:sp>
+        <p:nvSpPr>
+          <p:cNvPr id="31" name="TextBox 30"/>
+          <p:cNvSpPr txBox="1"/>
+          <p:nvPr/>
+        </p:nvSpPr>
+        <p:spPr>
+          <a:xfrm>
+            <a:off x="6208776" y="4352544"/>
+            <a:ext cx="5184648" cy="886968"/>
+          </a:xfrm>
+          <a:prstGeom prst="rect">
+            <a:avLst/>
+          </a:prstGeom>
+          <a:noFill/>
+        </p:spPr>
+        <p:txBody>
+          <a:bodyPr wrap="square" anchor="ctr">
+            <a:spAutoFit/>
+          </a:bodyPr>
+          <a:lstStyle/>
+          <a:p>
+            <a:pPr algn="l"/>
+            <a:r>
+              <a:rPr sz="1050" b="0">
+                <a:solidFill>
+                  <a:srgbClr val="F5F2E9"/>
+                </a:solidFill>
+                <a:latin typeface="Aptos"/>
+              </a:rPr>
+              <a:t>Role parser → quantity + role skill + role CL → future availability filter → unique-resource assignment
+Output: team resource list, role gaps, and fulfilled / unfulfilled summary</a:t>
+            </a:r>
+          </a:p>
+        </p:txBody>
+      </p:sp>
+      <p:sp>
+        <p:nvSpPr>
+          <p:cNvPr id="32" name="TextBox 31"/>
+          <p:cNvSpPr txBox="1"/>
+          <p:nvPr/>
+        </p:nvSpPr>
+        <p:spPr>
+          <a:xfrm>
+            <a:off x="566928" y="5596128"/>
+            <a:ext cx="10972800" cy="274320"/>
+          </a:xfrm>
+          <a:prstGeom prst="rect">
+            <a:avLst/>
+          </a:prstGeom>
+          <a:noFill/>
+        </p:spPr>
+        <p:txBody>
+          <a:bodyPr wrap="square" anchor="ctr">
+            <a:spAutoFit/>
+          </a:bodyPr>
+          <a:lstStyle/>
+          <a:p>
+            <a:pPr algn="l"/>
+            <a:r>
+              <a:rPr sz="1300" b="1">
+                <a:solidFill>
+                  <a:srgbClr val="D8B85A"/>
+                </a:solidFill>
+                <a:latin typeface="Aptos"/>
+              </a:rPr>
+              <a:t>Shared deterministic business rules</a:t>
+            </a:r>
+          </a:p>
+        </p:txBody>
+      </p:sp>
+      <p:sp>
+        <p:nvSpPr>
+          <p:cNvPr id="33" name="Rounded Rectangle 32"/>
+          <p:cNvSpPr/>
+          <p:nvPr/>
+        </p:nvSpPr>
+        <p:spPr>
+          <a:xfrm>
+            <a:off x="502920" y="5925312"/>
+            <a:ext cx="11018520" cy="502920"/>
+          </a:xfrm>
+          <a:prstGeom prst="roundRect">
+            <a:avLst/>
+          </a:prstGeom>
+          <a:solidFill>
+            <a:srgbClr val="123046"/>
+          </a:solidFill>
+          <a:ln>
+            <a:solidFill>
+              <a:srgbClr val="467DA5"/>
+            </a:solidFill>
+          </a:ln>
+        </p:spPr>
+        <p:style>
+          <a:lnRef idx="1">
+            <a:schemeClr val="accent1"/>
+          </a:lnRef>
+          <a:fillRef idx="3">
+            <a:schemeClr val="accent1"/>
+          </a:fillRef>
+          <a:effectRef idx="2">
+            <a:schemeClr val="accent1"/>
+          </a:effectRef>
+          <a:fontRef idx="minor">
+            <a:schemeClr val="lt1"/>
+          </a:fontRef>
+        </p:style>
+        <p:txBody>
+          <a:bodyPr rtlCol="0" anchor="ctr"/>
+          <a:lstStyle/>
+          <a:p>
+            <a:pPr algn="ctr"/>
+          </a:p>
+        </p:txBody>
+      </p:sp>
+      <p:sp>
+        <p:nvSpPr>
+          <p:cNvPr id="34" name="TextBox 33"/>
+          <p:cNvSpPr txBox="1"/>
+          <p:nvPr/>
+        </p:nvSpPr>
+        <p:spPr>
+          <a:xfrm>
+            <a:off x="713232" y="5925312"/>
+            <a:ext cx="10607040" cy="502920"/>
+          </a:xfrm>
+          <a:prstGeom prst="rect">
+            <a:avLst/>
+          </a:prstGeom>
+          <a:noFill/>
+        </p:spPr>
+        <p:txBody>
+          <a:bodyPr wrap="square" anchor="ctr">
+            <a:spAutoFit/>
+          </a:bodyPr>
+          <a:lstStyle/>
+          <a:p>
+            <a:pPr algn="ctr"/>
+            <a:r>
+              <a:rPr sz="1050" b="1">
+                <a:solidFill>
+                  <a:srgbClr val="F5F2E9"/>
+                </a:solidFill>
+                <a:latin typeface="Aptos"/>
+              </a:rPr>
+              <a:t>Exact career-level matching  |  Positive availability  |  Contract-date eligibility  |  Primary / secondary skills  |  No duplicate EnterpriseId  |  Traceable workbook fields</a:t>
+            </a:r>
+          </a:p>
+        </p:txBody>
+      </p:sp>
+      <p:sp>
+        <p:nvSpPr>
+          <p:cNvPr id="35" name="TextBox 34"/>
+          <p:cNvSpPr txBox="1"/>
+          <p:nvPr/>
+        </p:nvSpPr>
+        <p:spPr>
+          <a:xfrm>
+            <a:off x="530352" y="6547104"/>
+            <a:ext cx="10972800" cy="219456"/>
+          </a:xfrm>
+          <a:prstGeom prst="rect">
+            <a:avLst/>
+          </a:prstGeom>
+          <a:noFill/>
+        </p:spPr>
+        <p:txBody>
+          <a:bodyPr wrap="square" anchor="ctr">
+            <a:spAutoFit/>
+          </a:bodyPr>
+          <a:lstStyle/>
+          <a:p>
+            <a:pPr algn="ctr"/>
+            <a:r>
+              <a:rPr sz="950" b="0">
+                <a:solidFill>
+                  <a:srgbClr val="C2D3DE"/>
+                </a:solidFill>
+                <a:latin typeface="Aptos"/>
+              </a:rPr>
+              <a:t>Architecture principle: GenAI may explain results later, but eligibility and staffing decisions remain deterministic.</a:t>
             </a:r>
           </a:p>
         </p:txBody>
